--- a/vta/slides/Module_1_Pulmonary_Anatomy_Physiology.pptx
+++ b/vta/slides/Module_1_Pulmonary_Anatomy_Physiology.pptx
@@ -2059,7 +2059,7 @@
                 <a:ea typeface="Calibri" pitchFamily="34" charset="-122"/>
                 <a:cs typeface="Calibri" pitchFamily="34" charset="-120"/>
               </a:rPr>
-              <a:t>Day 1 · Foundations</a:t>
+              <a:t>Foundations</a:t>
             </a:r>
             <a:pPr indent="0" marL="0">
               <a:buNone/>
@@ -2073,7 +2073,7 @@
                 <a:ea typeface="Calibri" pitchFamily="34" charset="-122"/>
                 <a:cs typeface="Calibri" pitchFamily="34" charset="-120"/>
               </a:rPr>
-              <a:t>   ·   ~45 min   ·   7 lessons</a:t>
+              <a:t>   ·   7 lessons</a:t>
             </a:r>
             <a:endParaRPr lang="en-US" sz="1300" dirty="0"/>
           </a:p>
@@ -2636,7 +2636,9 @@
       </p:sp>
       <p:sp>
         <p:nvSpPr>
-          <p:cNvPr id="14" name="Text 12"/>
+          <p:cNvPr id="14" name="Text 12">
+            <a:hlinkClick r:id="rId1" tooltip="Open this module's simulator mission"/>
+          </p:cNvPr>
           <p:cNvSpPr/>
           <p:nvPr/>
         </p:nvSpPr>
@@ -2659,13 +2661,20 @@
               <a:buNone/>
             </a:pPr>
             <a:r>
-              <a:rPr lang="en-US" sz="1700" b="1" dirty="0">
+              <a:rPr lang="en-US" sz="1700" b="1" u="sng" dirty="0">
                 <a:solidFill>
                   <a:srgbClr val="FFFFFF"/>
                 </a:solidFill>
                 <a:latin typeface="Calibri" pitchFamily="34" charset="0"/>
                 <a:ea typeface="Calibri" pitchFamily="34" charset="-122"/>
                 <a:cs typeface="Calibri" pitchFamily="34" charset="-120"/>
+                <a:hlinkClick r:id="rId1" invalidUrl="" action="" tgtFrame="" tooltip="Open this module's simulator mission" history="1" highlightClick="0" endSnd="0">
+                  <a:extLst>
+                    <a:ext uri="{A12FA001-AC4F-418D-AE19-62706E023703}">
+                      <ahyp:hlinkClr xmlns:ahyp="http://schemas.microsoft.com/office/drawing/2018/hyperlinkcolor" val="tx"/>
+                    </a:ext>
+                  </a:extLst>
+                </a:hlinkClick>
               </a:rPr>
               <a:t>LTV 1200 Simulator</a:t>
             </a:r>
@@ -2698,13 +2707,20 @@
               <a:buNone/>
             </a:pPr>
             <a:r>
-              <a:rPr lang="en-US" sz="1250" dirty="0">
-                <a:solidFill>
-                  <a:srgbClr val="A9C2E0"/>
-                </a:solidFill>
-                <a:latin typeface="Calibri" pitchFamily="34" charset="0"/>
-                <a:ea typeface="Calibri" pitchFamily="34" charset="-122"/>
-                <a:cs typeface="Calibri" pitchFamily="34" charset="-120"/>
+              <a:rPr lang="en-US" sz="1250" u="sng" dirty="0">
+                <a:solidFill>
+                  <a:srgbClr val="7FB0E6"/>
+                </a:solidFill>
+                <a:latin typeface="Calibri" pitchFamily="34" charset="0"/>
+                <a:ea typeface="Calibri" pitchFamily="34" charset="-122"/>
+                <a:cs typeface="Calibri" pitchFamily="34" charset="-120"/>
+                <a:hlinkClick r:id="rId2" invalidUrl="" action="" tgtFrame="" tooltip="" history="1" highlightClick="0" endSnd="0">
+                  <a:extLst>
+                    <a:ext uri="{A12FA001-AC4F-418D-AE19-62706E023703}">
+                      <ahyp:hlinkClr xmlns:ahyp="http://schemas.microsoft.com/office/drawing/2018/hyperlinkcolor" val="tx"/>
+                    </a:ext>
+                  </a:extLst>
+                </a:hlinkClick>
               </a:rPr>
               <a:t>vent-ltv1200.html?level=1  —  Meet the LTV 1200 hands-on — the Level 1 tutorial builds every control from scratch…</a:t>
             </a:r>
@@ -4377,7 +4393,7 @@
         <p:spPr>
           <a:xfrm>
             <a:off x="548640" y="2148840"/>
-            <a:ext cx="6309360" cy="4114800"/>
+            <a:ext cx="6309360" cy="4160520"/>
           </a:xfrm>
           <a:prstGeom prst="rect">
             <a:avLst/>
@@ -4394,7 +4410,7 @@
                 <a:spcPct val="100000"/>
               </a:lnSpc>
               <a:spcAft>
-                <a:spcPts val="900"/>
+                <a:spcPts val="1000"/>
               </a:spcAft>
               <a:buSzPct val="100000"/>
               <a:buChar char="•"/>
@@ -4418,7 +4434,7 @@
                 <a:spcPct val="100000"/>
               </a:lnSpc>
               <a:spcAft>
-                <a:spcPts val="900"/>
+                <a:spcPts val="1000"/>
               </a:spcAft>
               <a:buSzPct val="100000"/>
               <a:buChar char="•"/>
@@ -4442,7 +4458,7 @@
                 <a:spcPct val="100000"/>
               </a:lnSpc>
               <a:spcAft>
-                <a:spcPts val="900"/>
+                <a:spcPts val="1000"/>
               </a:spcAft>
               <a:buSzPct val="100000"/>
               <a:buChar char="•"/>
@@ -4466,7 +4482,7 @@
                 <a:spcPct val="100000"/>
               </a:lnSpc>
               <a:spcAft>
-                <a:spcPts val="900"/>
+                <a:spcPts val="1000"/>
               </a:spcAft>
               <a:buSzPct val="100000"/>
               <a:buChar char="•"/>
@@ -4789,7 +4805,7 @@
         <p:spPr>
           <a:xfrm>
             <a:off x="548640" y="2148840"/>
-            <a:ext cx="6309360" cy="4114800"/>
+            <a:ext cx="6309360" cy="4160520"/>
           </a:xfrm>
           <a:prstGeom prst="rect">
             <a:avLst/>
@@ -4806,7 +4822,7 @@
                 <a:spcPct val="100000"/>
               </a:lnSpc>
               <a:spcAft>
-                <a:spcPts val="900"/>
+                <a:spcPts val="1000"/>
               </a:spcAft>
               <a:buSzPct val="100000"/>
               <a:buChar char="•"/>
@@ -4820,7 +4836,7 @@
                 <a:ea typeface="Calibri" pitchFamily="34" charset="-122"/>
                 <a:cs typeface="Calibri" pitchFamily="34" charset="-120"/>
               </a:rPr>
-              <a:t>The pulmonary system has two zones.</a:t>
+              <a:t>The pulmonary system has two zones. The conducting zone is everything from the mouth to the terminal bronchioles. It moves air. No gas exchange occurs here.</a:t>
             </a:r>
             <a:endParaRPr lang="en-US" sz="1550" dirty="0"/>
           </a:p>
@@ -4830,7 +4846,7 @@
                 <a:spcPct val="100000"/>
               </a:lnSpc>
               <a:spcAft>
-                <a:spcPts val="900"/>
+                <a:spcPts val="1000"/>
               </a:spcAft>
               <a:buSzPct val="100000"/>
               <a:buChar char="•"/>
@@ -4844,7 +4860,7 @@
                 <a:ea typeface="Calibri" pitchFamily="34" charset="-122"/>
                 <a:cs typeface="Calibri" pitchFamily="34" charset="-120"/>
               </a:rPr>
-              <a:t>The respiratory zone is where gas exchange happens.</a:t>
+              <a:t>The respiratory zone is where gas exchange happens. Type I pneumocytes form the thin alveolar wall (0.2–0.5 µm thick — about 1/100 the diameter of a red blood cell). Type II pneumocytes produce surfactant.</a:t>
             </a:r>
             <a:endParaRPr lang="en-US" sz="1550" dirty="0"/>
           </a:p>
@@ -4854,7 +4870,7 @@
                 <a:spcPct val="100000"/>
               </a:lnSpc>
               <a:spcAft>
-                <a:spcPts val="900"/>
+                <a:spcPts val="1000"/>
               </a:spcAft>
               <a:buSzPct val="100000"/>
               <a:buChar char="•"/>
@@ -4868,7 +4884,7 @@
                 <a:ea typeface="Calibri" pitchFamily="34" charset="-122"/>
                 <a:cs typeface="Calibri" pitchFamily="34" charset="-120"/>
               </a:rPr>
-              <a:t>Picture two soap bubbles tied to the ends of a straw, one small and one large.</a:t>
+              <a:t>Picture two soap bubbles tied to the ends of a straw, one small and one large. By Laplace's law the small bubble has the higher pressure, so it empties itself into the big one and collapses.</a:t>
             </a:r>
             <a:endParaRPr lang="en-US" sz="1550" dirty="0"/>
           </a:p>
@@ -4878,7 +4894,7 @@
                 <a:spcPct val="100000"/>
               </a:lnSpc>
               <a:spcAft>
-                <a:spcPts val="900"/>
+                <a:spcPts val="1000"/>
               </a:spcAft>
               <a:buSzPct val="100000"/>
               <a:buChar char="•"/>
@@ -4892,7 +4908,7 @@
                 <a:ea typeface="Calibri" pitchFamily="34" charset="-122"/>
                 <a:cs typeface="Calibri" pitchFamily="34" charset="-120"/>
               </a:rPr>
-              <a:t>When the soap is gone, PEEP is your bedside replacement: it is the doorstop you wedge under each alveolus, splinting it open mechanically until surfactant…</a:t>
+              <a:t>When the soap is gone, PEEP is your bedside replacement: it is the doorstop you wedge under each alveolus, splinting it open mechanically until surfactant function returns.</a:t>
             </a:r>
             <a:endParaRPr lang="en-US" sz="1550" dirty="0"/>
           </a:p>
@@ -5201,7 +5217,7 @@
         <p:spPr>
           <a:xfrm>
             <a:off x="548640" y="2148840"/>
-            <a:ext cx="6309360" cy="4114800"/>
+            <a:ext cx="6309360" cy="4160520"/>
           </a:xfrm>
           <a:prstGeom prst="rect">
             <a:avLst/>
@@ -5218,7 +5234,7 @@
                 <a:spcPct val="100000"/>
               </a:lnSpc>
               <a:spcAft>
-                <a:spcPts val="900"/>
+                <a:spcPts val="1000"/>
               </a:spcAft>
               <a:buSzPct val="100000"/>
               <a:buChar char="•"/>
@@ -5232,7 +5248,7 @@
                 <a:ea typeface="Calibri" pitchFamily="34" charset="-122"/>
                 <a:cs typeface="Calibri" pitchFamily="34" charset="-120"/>
               </a:rPr>
-              <a:t>This is the single most useful mental model in mechanical ventilation — memorize it now.</a:t>
+              <a:t>This is the single most useful mental model in mechanical ventilation — memorize it now. Picture the lung as a house with two completely separate chores, each with its own set of controls.</a:t>
             </a:r>
             <a:endParaRPr lang="en-US" sz="1550" dirty="0"/>
           </a:p>
@@ -5242,7 +5258,7 @@
                 <a:spcPct val="100000"/>
               </a:lnSpc>
               <a:spcAft>
-                <a:spcPts val="900"/>
+                <a:spcPts val="1000"/>
               </a:spcAft>
               <a:buSzPct val="100000"/>
               <a:buChar char="•"/>
@@ -5256,7 +5272,7 @@
                 <a:ea typeface="Calibri" pitchFamily="34" charset="-122"/>
                 <a:cs typeface="Calibri" pitchFamily="34" charset="-120"/>
               </a:rPr>
-              <a:t>Ventilation is taking out the trash — clearing CO₂.</a:t>
+              <a:t>Ventilation is taking out the trash — clearing CO₂. You run it with two knobs: Respiratory Rate (RR) and Tidal Volume (Vt) — how often the trash goes out and how big each load is.</a:t>
             </a:r>
             <a:endParaRPr lang="en-US" sz="1550" dirty="0"/>
           </a:p>
@@ -5266,7 +5282,7 @@
                 <a:spcPct val="100000"/>
               </a:lnSpc>
               <a:spcAft>
-                <a:spcPts val="900"/>
+                <a:spcPts val="1000"/>
               </a:spcAft>
               <a:buSzPct val="100000"/>
               <a:buChar char="•"/>
@@ -5290,7 +5306,7 @@
                 <a:spcPct val="100000"/>
               </a:lnSpc>
               <a:spcAft>
-                <a:spcPts val="900"/>
+                <a:spcPts val="1000"/>
               </a:spcAft>
               <a:buSzPct val="100000"/>
               <a:buChar char="•"/>
@@ -5304,7 +5320,7 @@
                 <a:ea typeface="Calibri" pitchFamily="34" charset="-122"/>
                 <a:cs typeface="Calibri" pitchFamily="34" charset="-120"/>
               </a:rPr>
-              <a:t>Most ventilator errors are turning the wrong knob — bumping FiO₂ to fix a rising CO₂, or cranking the rate to fix a low saturation.</a:t>
+              <a:t>Most ventilator errors are turning the wrong knob — bumping FiO₂ to fix a rising CO₂, or cranking the rate to fix a low saturation. Pair them in your head: RR + Vt for ventilation, FiO₂ + PEEP for oxygenation.</a:t>
             </a:r>
             <a:endParaRPr lang="en-US" sz="1550" dirty="0"/>
           </a:p>
@@ -5613,7 +5629,7 @@
         <p:spPr>
           <a:xfrm>
             <a:off x="548640" y="2148840"/>
-            <a:ext cx="10058400" cy="4114800"/>
+            <a:ext cx="10058400" cy="4160520"/>
           </a:xfrm>
           <a:prstGeom prst="rect">
             <a:avLst/>
@@ -5630,7 +5646,7 @@
                 <a:spcPct val="100000"/>
               </a:lnSpc>
               <a:spcAft>
-                <a:spcPts val="900"/>
+                <a:spcPts val="1000"/>
               </a:spcAft>
               <a:buSzPct val="100000"/>
               <a:buChar char="•"/>
@@ -5644,7 +5660,7 @@
                 <a:ea typeface="Calibri" pitchFamily="34" charset="-122"/>
                 <a:cs typeface="Calibri" pitchFamily="34" charset="-120"/>
               </a:rPr>
-              <a:t>Every breath is like mailing a package down a long hallway to a room at the far end.</a:t>
+              <a:t>Every breath is like mailing a package down a long hallway to a room at the far end. The hallway holds air but does no gas exchange — anything that never reaches the room is wasted effort.</a:t>
             </a:r>
             <a:endParaRPr lang="en-US" sz="1550" dirty="0"/>
           </a:p>
@@ -5654,7 +5670,7 @@
                 <a:spcPct val="100000"/>
               </a:lnSpc>
               <a:spcAft>
-                <a:spcPts val="900"/>
+                <a:spcPts val="1000"/>
               </a:spcAft>
               <a:buSzPct val="100000"/>
               <a:buChar char="•"/>
@@ -5678,7 +5694,7 @@
                 <a:spcPct val="100000"/>
               </a:lnSpc>
               <a:spcAft>
-                <a:spcPts val="900"/>
+                <a:spcPts val="1000"/>
               </a:spcAft>
               <a:buSzPct val="100000"/>
               <a:buChar char="•"/>
@@ -5692,7 +5708,7 @@
                 <a:ea typeface="Calibri" pitchFamily="34" charset="-122"/>
                 <a:cs typeface="Calibri" pitchFamily="34" charset="-120"/>
               </a:rPr>
-              <a:t>Total physiologic dead space is normally about 30% of tidal volume in a healthy adult.</a:t>
+              <a:t>Total physiologic dead space is normally about 30% of tidal volume in a healthy adult. A study by Nuckton and colleagues (NEJM 2002) showed that VD/VT greater than 0.6 in ARDS strongly predicts mortality.</a:t>
             </a:r>
             <a:endParaRPr lang="en-US" sz="1550" dirty="0"/>
           </a:p>
@@ -5702,7 +5718,7 @@
                 <a:spcPct val="100000"/>
               </a:lnSpc>
               <a:spcAft>
-                <a:spcPts val="900"/>
+                <a:spcPts val="1000"/>
               </a:spcAft>
               <a:buSzPct val="100000"/>
               <a:buChar char="•"/>
@@ -5716,7 +5732,7 @@
                 <a:ea typeface="Calibri" pitchFamily="34" charset="-122"/>
                 <a:cs typeface="Calibri" pitchFamily="34" charset="-120"/>
               </a:rPr>
-              <a:t>The practical bedside implication: tidal volume must be large enough to overcome dead space.</a:t>
+              <a:t>The practical bedside implication: tidal volume must be large enough to overcome dead space. Set Vt too low and the whole breath gets stuck in the hallway — dead space eats it before any reaches the room.</a:t>
             </a:r>
             <a:endParaRPr lang="en-US" sz="1550" dirty="0"/>
           </a:p>
@@ -5880,7 +5896,7 @@
         <p:spPr>
           <a:xfrm>
             <a:off x="548640" y="2148840"/>
-            <a:ext cx="6309360" cy="4114800"/>
+            <a:ext cx="6309360" cy="4160520"/>
           </a:xfrm>
           <a:prstGeom prst="rect">
             <a:avLst/>
@@ -5897,7 +5913,7 @@
                 <a:spcPct val="100000"/>
               </a:lnSpc>
               <a:spcAft>
-                <a:spcPts val="900"/>
+                <a:spcPts val="1000"/>
               </a:spcAft>
               <a:buSzPct val="100000"/>
               <a:buChar char="•"/>
@@ -5911,7 +5927,7 @@
                 <a:ea typeface="Calibri" pitchFamily="34" charset="-122"/>
                 <a:cs typeface="Calibri" pitchFamily="34" charset="-120"/>
               </a:rPr>
-              <a:t>Picture a bus line where the buses are air and the passengers are blood.</a:t>
+              <a:t>Picture a bus line where the buses are air and the passengers are blood. Gas exchange only happens where a bus and its passengers actually meet.</a:t>
             </a:r>
             <a:endParaRPr lang="en-US" sz="1550" dirty="0"/>
           </a:p>
@@ -5921,7 +5937,7 @@
                 <a:spcPct val="100000"/>
               </a:lnSpc>
               <a:spcAft>
-                <a:spcPts val="900"/>
+                <a:spcPts val="1000"/>
               </a:spcAft>
               <a:buSzPct val="100000"/>
               <a:buChar char="•"/>
@@ -5935,7 +5951,7 @@
                 <a:ea typeface="Calibri" pitchFamily="34" charset="-122"/>
                 <a:cs typeface="Calibri" pitchFamily="34" charset="-120"/>
               </a:rPr>
-              <a:t>Shunt is passengers crowding a stop the bus skips entirely — perfusion with no ventilation, V/Q approaching zero.</a:t>
+              <a:t>Shunt is passengers crowding a stop the bus skips entirely — perfusion with no ventilation, V/Q approaching zero. Pneumonia, pulmonary edema, ARDS, and atelectasis all produce shunt.</a:t>
             </a:r>
             <a:endParaRPr lang="en-US" sz="1550" dirty="0"/>
           </a:p>
@@ -5945,7 +5961,7 @@
                 <a:spcPct val="100000"/>
               </a:lnSpc>
               <a:spcAft>
-                <a:spcPts val="900"/>
+                <a:spcPts val="1000"/>
               </a:spcAft>
               <a:buSzPct val="100000"/>
               <a:buChar char="•"/>
@@ -5959,7 +5975,7 @@
                 <a:ea typeface="Calibri" pitchFamily="34" charset="-122"/>
                 <a:cs typeface="Calibri" pitchFamily="34" charset="-120"/>
               </a:rPr>
-              <a:t>Dead space is the mirror image: a bus running its full route past empty stops — ventilation with no perfusion.</a:t>
+              <a:t>Dead space is the mirror image: a bus running its full route past empty stops — ventilation with no perfusion. Pulmonary embolism, low cardiac output, and severe hypovolemia produce dead-space physiology.</a:t>
             </a:r>
             <a:endParaRPr lang="en-US" sz="1550" dirty="0"/>
           </a:p>
@@ -5969,7 +5985,7 @@
                 <a:spcPct val="100000"/>
               </a:lnSpc>
               <a:spcAft>
-                <a:spcPts val="900"/>
+                <a:spcPts val="1000"/>
               </a:spcAft>
               <a:buSzPct val="100000"/>
               <a:buChar char="•"/>
@@ -5983,7 +5999,7 @@
                 <a:ea typeface="Calibri" pitchFamily="34" charset="-122"/>
                 <a:cs typeface="Calibri" pitchFamily="34" charset="-120"/>
               </a:rPr>
-              <a:t>Hypoxic Pulmonary Vasoconstriction (HPV) is a partial auto-correction: the lung constricts arterioles in poorly ventilated regions, diverting blood toward…</a:t>
+              <a:t>Hypoxic Pulmonary Vasoconstriction (HPV) is a partial auto-correction: the lung constricts arterioles in poorly ventilated regions, diverting blood toward better-ventilated alveoli.</a:t>
             </a:r>
             <a:endParaRPr lang="en-US" sz="1550" dirty="0"/>
           </a:p>
@@ -6292,7 +6308,7 @@
         <p:spPr>
           <a:xfrm>
             <a:off x="548640" y="2148840"/>
-            <a:ext cx="10058400" cy="4114800"/>
+            <a:ext cx="10058400" cy="4160520"/>
           </a:xfrm>
           <a:prstGeom prst="rect">
             <a:avLst/>
@@ -6309,7 +6325,7 @@
                 <a:spcPct val="100000"/>
               </a:lnSpc>
               <a:spcAft>
-                <a:spcPts val="900"/>
+                <a:spcPts val="1000"/>
               </a:spcAft>
               <a:buSzPct val="100000"/>
               <a:buChar char="•"/>
@@ -6323,7 +6339,7 @@
                 <a:ea typeface="Calibri" pitchFamily="34" charset="-122"/>
                 <a:cs typeface="Calibri" pitchFamily="34" charset="-120"/>
               </a:rPr>
-              <a:t>Imagine blowing up a balloon through a straw — two completely separate things can make it hard.</a:t>
+              <a:t>Imagine blowing up a balloon through a straw — two completely separate things can make it hard. The first is the balloon's stiffness. That is compliance: how much volume the lung accepts for a given pressure.</a:t>
             </a:r>
             <a:endParaRPr lang="en-US" sz="1550" dirty="0"/>
           </a:p>
@@ -6333,7 +6349,7 @@
                 <a:spcPct val="100000"/>
               </a:lnSpc>
               <a:spcAft>
-                <a:spcPts val="900"/>
+                <a:spcPts val="1000"/>
               </a:spcAft>
               <a:buSzPct val="100000"/>
               <a:buChar char="•"/>
@@ -6347,7 +6363,7 @@
                 <a:ea typeface="Calibri" pitchFamily="34" charset="-122"/>
                 <a:cs typeface="Calibri" pitchFamily="34" charset="-120"/>
               </a:rPr>
-              <a:t>The second is the straw's narrowness.</a:t>
+              <a:t>The second is the straw's narrowness. That is resistance: how hard the airway pushes back against airflow.</a:t>
             </a:r>
             <a:endParaRPr lang="en-US" sz="1550" dirty="0"/>
           </a:p>
@@ -6357,7 +6373,7 @@
                 <a:spcPct val="100000"/>
               </a:lnSpc>
               <a:spcAft>
-                <a:spcPts val="900"/>
+                <a:spcPts val="1000"/>
               </a:spcAft>
               <a:buSzPct val="100000"/>
               <a:buChar char="•"/>
@@ -6371,7 +6387,7 @@
                 <a:ea typeface="Calibri" pitchFamily="34" charset="-122"/>
                 <a:cs typeface="Calibri" pitchFamily="34" charset="-120"/>
               </a:rPr>
-              <a:t>Both can raise PIP on the ventilator — but only reduced compliance raises Pplat.</a:t>
+              <a:t>Both can raise PIP on the ventilator — but only reduced compliance raises Pplat. That distinction is the foundation of bedside troubleshooting and the subject of the next lesson.</a:t>
             </a:r>
             <a:endParaRPr lang="en-US" sz="1550" dirty="0"/>
           </a:p>
@@ -6535,7 +6551,7 @@
         <p:spPr>
           <a:xfrm>
             <a:off x="548640" y="2148840"/>
-            <a:ext cx="6309360" cy="4114800"/>
+            <a:ext cx="6309360" cy="4160520"/>
           </a:xfrm>
           <a:prstGeom prst="rect">
             <a:avLst/>
@@ -6552,7 +6568,7 @@
                 <a:spcPct val="100000"/>
               </a:lnSpc>
               <a:spcAft>
-                <a:spcPts val="900"/>
+                <a:spcPts val="1000"/>
               </a:spcAft>
               <a:buSzPct val="100000"/>
               <a:buChar char="•"/>
@@ -6576,7 +6592,7 @@
                 <a:spcPct val="100000"/>
               </a:lnSpc>
               <a:spcAft>
-                <a:spcPts val="900"/>
+                <a:spcPts val="1000"/>
               </a:spcAft>
               <a:buSzPct val="100000"/>
               <a:buChar char="•"/>
@@ -6590,7 +6606,7 @@
                 <a:ea typeface="Calibri" pitchFamily="34" charset="-122"/>
                 <a:cs typeface="Calibri" pitchFamily="34" charset="-120"/>
               </a:rPr>
-              <a:t>The relationship is mechanical: PIP is approximately Pplat plus (Resistance × Flow).</a:t>
+              <a:t>The relationship is mechanical: PIP is approximately Pplat plus (Resistance × Flow). Clog the nozzle and resistance rises — PIP climbs but Pplat does not. Stiffen the balloon and both rise together.</a:t>
             </a:r>
             <a:endParaRPr lang="en-US" sz="1550" dirty="0"/>
           </a:p>
@@ -6600,7 +6616,7 @@
                 <a:spcPct val="100000"/>
               </a:lnSpc>
               <a:spcAft>
-                <a:spcPts val="900"/>
+                <a:spcPts val="1000"/>
               </a:spcAft>
               <a:buSzPct val="100000"/>
               <a:buChar char="•"/>
@@ -6624,7 +6640,7 @@
                 <a:spcPct val="100000"/>
               </a:lnSpc>
               <a:spcAft>
-                <a:spcPts val="900"/>
+                <a:spcPts val="1000"/>
               </a:spcAft>
               <a:buSzPct val="100000"/>
               <a:buChar char="•"/>
@@ -6638,7 +6654,7 @@
                 <a:ea typeface="Calibri" pitchFamily="34" charset="-122"/>
                 <a:cs typeface="Calibri" pitchFamily="34" charset="-120"/>
               </a:rPr>
-              <a:t>Driving pressure (Pplat minus PEEP) has emerged as a strong mortality predictor in ARDS (Amato 2015, NEJM).</a:t>
+              <a:t>Driving pressure (Pplat minus PEEP) has emerged as a strong mortality predictor in ARDS (Amato 2015, NEJM). Aim for ΔP less than 14 cmH₂O. You'll use this rule in Module 4 and again in Module 9.</a:t>
             </a:r>
             <a:endParaRPr lang="en-US" sz="1550" dirty="0"/>
           </a:p>

--- a/vta/slides/Module_1_Pulmonary_Anatomy_Physiology.pptx
+++ b/vta/slides/Module_1_Pulmonary_Anatomy_Physiology.pptx
@@ -959,7 +959,7 @@
               <a:t>The pulmonary system has two zones. The conducting zone is everything from the mouth to the terminal bronchioles. It moves air. No gas exchange occurs here. The volume that fills it on each breath is anatomic dead space — approximately 2 mL per kilogram of body weight, or about 150 mL in a 70 kg adult.
 The respiratory zone is where gas exchange happens. Type I pneumocytes form the thin alveolar wall (0.2–0.5 µm thick — about 1/100 the diameter of a red blood cell). Type II pneumocytes produce surfactant.
 Picture two soap bubbles tied to the ends of a straw, one small and one large. By Laplace's law the small bubble has the higher pressure, so it empties itself into the big one and collapses. Alveoli would do the same to each other on every exhale — except for surfactant, the dish soap Type II cells make to lower that surface tension so the smallest alveoli survive instead of caving into their neighbors. ARDS, smoke inhalation, drowning, and gastric aspiration all damage Type II cells or wash the soap out.
-When the soap is gone, PEEP is your bedside replacement: it is the doorstop you wedge under each alveolus, splinting it open mechanically until surfactant function returns.
+When the soap is gone, PEEP is NOT a substitute for surfactant — but it buys time: it is the doorstop you wedge under each alveolus, mechanically splinting it open until surfactant function returns.
 EVIDENCE — Surfactant and PEEP: Conditions that damage Type II pneumocytes produce a stiff lung with refractory hypoxia. The bedside fix is PEEP — not more FiO₂.</a:t>
             </a:r>
             <a:endParaRPr lang="en-US" dirty="0"/>
@@ -4908,7 +4908,7 @@
                 <a:ea typeface="Calibri" pitchFamily="34" charset="-122"/>
                 <a:cs typeface="Calibri" pitchFamily="34" charset="-120"/>
               </a:rPr>
-              <a:t>When the soap is gone, PEEP is your bedside replacement: it is the doorstop you wedge under each alveolus, splinting it open mechanically until surfactant function returns.</a:t>
+              <a:t>When the soap is gone, PEEP is NOT a substitute for surfactant — but it buys time: it is the doorstop you wedge under each alveolus, mechanically splinting it open until surfactant function returns.</a:t>
             </a:r>
             <a:endParaRPr lang="en-US" sz="1550" dirty="0"/>
           </a:p>

--- a/vta/slides/Module_1_Pulmonary_Anatomy_Physiology.pptx
+++ b/vta/slides/Module_1_Pulmonary_Anatomy_Physiology.pptx
@@ -5326,151 +5326,30 @@
           </a:p>
         </p:txBody>
       </p:sp>
-      <p:sp>
-        <p:nvSpPr>
-          <p:cNvPr id="6" name="Shape 4"/>
-          <p:cNvSpPr/>
-          <p:nvPr/>
-        </p:nvSpPr>
-        <p:spPr>
-          <a:xfrm>
-            <a:off x="7315200" y="2148840"/>
-            <a:ext cx="4325112" cy="3840480"/>
-          </a:xfrm>
-          <a:prstGeom prst="roundRect">
-            <a:avLst>
-              <a:gd name="adj" fmla="val 2381"/>
-            </a:avLst>
-          </a:prstGeom>
-          <a:solidFill>
-            <a:srgbClr val="FBEFDD"/>
-          </a:solidFill>
-          <a:ln/>
-        </p:spPr>
-      </p:sp>
-      <p:sp>
-        <p:nvSpPr>
-          <p:cNvPr id="7" name="Text 5"/>
-          <p:cNvSpPr/>
-          <p:nvPr/>
-        </p:nvSpPr>
-        <p:spPr>
-          <a:xfrm>
-            <a:off x="7589520" y="2377440"/>
-            <a:ext cx="3776472" cy="320040"/>
+      <p:pic>
+        <p:nvPicPr>
+          <p:cNvPr id="6" name="Image 0" descr="/tmp/claude-0/-home-user-amr-kc-protocols/883711fe-5eaa-500f-ae13-4d63d2ddcc7e/scratchpad/pngs/twoknobs.png">    </p:cNvPr>
+          <p:cNvPicPr>
+            <a:picLocks noChangeAspect="1"/>
+          </p:cNvPicPr>
+          <p:nvPr/>
+        </p:nvPicPr>
+        <p:blipFill>
+          <a:blip r:embed="rId1"/>
+          <a:stretch>
+            <a:fillRect/>
+          </a:stretch>
+        </p:blipFill>
+        <p:spPr>
+          <a:xfrm>
+            <a:off x="7040880" y="2822048"/>
+            <a:ext cx="4709160" cy="1945423"/>
           </a:xfrm>
           <a:prstGeom prst="rect">
             <a:avLst/>
           </a:prstGeom>
-          <a:noFill/>
-          <a:ln/>
-        </p:spPr>
-        <p:txBody>
-          <a:bodyPr wrap="square" rtlCol="0" anchor="ctr"/>
-          <a:lstStyle/>
-          <a:p>
-            <a:pPr indent="0" marL="0">
-              <a:buNone/>
-            </a:pPr>
-            <a:r>
-              <a:rPr lang="en-US" sz="1200" b="1" spc="200" kern="0" dirty="0">
-                <a:solidFill>
-                  <a:srgbClr val="9C540B"/>
-                </a:solidFill>
-                <a:latin typeface="Calibri" pitchFamily="34" charset="0"/>
-                <a:ea typeface="Calibri" pitchFamily="34" charset="-122"/>
-                <a:cs typeface="Calibri" pitchFamily="34" charset="-120"/>
-              </a:rPr>
-              <a:t>CLINICAL PEARL</a:t>
-            </a:r>
-            <a:endParaRPr lang="en-US" sz="1200" dirty="0"/>
-          </a:p>
-        </p:txBody>
-      </p:sp>
-      <p:sp>
-        <p:nvSpPr>
-          <p:cNvPr id="8" name="Text 6"/>
-          <p:cNvSpPr/>
-          <p:nvPr/>
-        </p:nvSpPr>
-        <p:spPr>
-          <a:xfrm>
-            <a:off x="7589520" y="2715768"/>
-            <a:ext cx="3776472" cy="640080"/>
-          </a:xfrm>
-          <a:prstGeom prst="rect">
-            <a:avLst/>
-          </a:prstGeom>
-          <a:noFill/>
-          <a:ln/>
-        </p:spPr>
-        <p:txBody>
-          <a:bodyPr wrap="square" rtlCol="0" anchor="t"/>
-          <a:lstStyle/>
-          <a:p>
-            <a:pPr indent="0" marL="0">
-              <a:lnSpc>
-                <a:spcPct val="95000"/>
-              </a:lnSpc>
-              <a:buNone/>
-            </a:pPr>
-            <a:r>
-              <a:rPr lang="en-US" sz="1700" b="1" dirty="0">
-                <a:solidFill>
-                  <a:srgbClr val="173A68"/>
-                </a:solidFill>
-                <a:latin typeface="Cambria" pitchFamily="34" charset="0"/>
-                <a:ea typeface="Cambria" pitchFamily="34" charset="-122"/>
-                <a:cs typeface="Cambria" pitchFamily="34" charset="-120"/>
-              </a:rPr>
-              <a:t>Two knobs each</a:t>
-            </a:r>
-            <a:endParaRPr lang="en-US" sz="1700" dirty="0"/>
-          </a:p>
-        </p:txBody>
-      </p:sp>
-      <p:sp>
-        <p:nvSpPr>
-          <p:cNvPr id="9" name="Text 7"/>
-          <p:cNvSpPr/>
-          <p:nvPr/>
-        </p:nvSpPr>
-        <p:spPr>
-          <a:xfrm>
-            <a:off x="7589520" y="3474720"/>
-            <a:ext cx="3776472" cy="2286000"/>
-          </a:xfrm>
-          <a:prstGeom prst="rect">
-            <a:avLst/>
-          </a:prstGeom>
-          <a:noFill/>
-          <a:ln/>
-        </p:spPr>
-        <p:txBody>
-          <a:bodyPr wrap="square" rtlCol="0" anchor="t"/>
-          <a:lstStyle/>
-          <a:p>
-            <a:pPr indent="0" marL="0">
-              <a:lnSpc>
-                <a:spcPct val="103000"/>
-              </a:lnSpc>
-              <a:buNone/>
-            </a:pPr>
-            <a:r>
-              <a:rPr lang="en-US" sz="1350" dirty="0">
-                <a:solidFill>
-                  <a:srgbClr val="1B2433"/>
-                </a:solidFill>
-                <a:latin typeface="Calibri" pitchFamily="34" charset="0"/>
-                <a:ea typeface="Calibri" pitchFamily="34" charset="-122"/>
-                <a:cs typeface="Calibri" pitchFamily="34" charset="-120"/>
-              </a:rPr>
-              <a:t>Ventilation = RR + Vt. Oxygenation = FiO₂ + PEEP. On the final exam. At every bedside for the rest of your career.</a:t>
-            </a:r>
-            <a:endParaRPr lang="en-US" sz="1350" dirty="0"/>
-          </a:p>
-        </p:txBody>
-      </p:sp>
+        </p:spPr>
+      </p:pic>
     </p:spTree>
   </p:cSld>
   <p:clrMapOvr>
@@ -6005,151 +5884,30 @@
           </a:p>
         </p:txBody>
       </p:sp>
-      <p:sp>
-        <p:nvSpPr>
-          <p:cNvPr id="6" name="Shape 4"/>
-          <p:cNvSpPr/>
-          <p:nvPr/>
-        </p:nvSpPr>
-        <p:spPr>
-          <a:xfrm>
-            <a:off x="7315200" y="2148840"/>
-            <a:ext cx="4325112" cy="3840480"/>
-          </a:xfrm>
-          <a:prstGeom prst="roundRect">
-            <a:avLst>
-              <a:gd name="adj" fmla="val 2381"/>
-            </a:avLst>
-          </a:prstGeom>
-          <a:solidFill>
-            <a:srgbClr val="FBEFDD"/>
-          </a:solidFill>
-          <a:ln/>
-        </p:spPr>
-      </p:sp>
-      <p:sp>
-        <p:nvSpPr>
-          <p:cNvPr id="7" name="Text 5"/>
-          <p:cNvSpPr/>
-          <p:nvPr/>
-        </p:nvSpPr>
-        <p:spPr>
-          <a:xfrm>
-            <a:off x="7589520" y="2377440"/>
-            <a:ext cx="3776472" cy="320040"/>
+      <p:pic>
+        <p:nvPicPr>
+          <p:cNvPr id="6" name="Image 0" descr="/tmp/claude-0/-home-user-amr-kc-protocols/883711fe-5eaa-500f-ae13-4d63d2ddcc7e/scratchpad/pngs/vq.png">    </p:cNvPr>
+          <p:cNvPicPr>
+            <a:picLocks noChangeAspect="1"/>
+          </p:cNvPicPr>
+          <p:nvPr/>
+        </p:nvPicPr>
+        <p:blipFill>
+          <a:blip r:embed="rId1"/>
+          <a:stretch>
+            <a:fillRect/>
+          </a:stretch>
+        </p:blipFill>
+        <p:spPr>
+          <a:xfrm>
+            <a:off x="7040880" y="2822048"/>
+            <a:ext cx="4709160" cy="1945423"/>
           </a:xfrm>
           <a:prstGeom prst="rect">
             <a:avLst/>
           </a:prstGeom>
-          <a:noFill/>
-          <a:ln/>
-        </p:spPr>
-        <p:txBody>
-          <a:bodyPr wrap="square" rtlCol="0" anchor="ctr"/>
-          <a:lstStyle/>
-          <a:p>
-            <a:pPr indent="0" marL="0">
-              <a:buNone/>
-            </a:pPr>
-            <a:r>
-              <a:rPr lang="en-US" sz="1200" b="1" spc="200" kern="0" dirty="0">
-                <a:solidFill>
-                  <a:srgbClr val="9C540B"/>
-                </a:solidFill>
-                <a:latin typeface="Calibri" pitchFamily="34" charset="0"/>
-                <a:ea typeface="Calibri" pitchFamily="34" charset="-122"/>
-                <a:cs typeface="Calibri" pitchFamily="34" charset="-120"/>
-              </a:rPr>
-              <a:t>CLINICAL PEARL</a:t>
-            </a:r>
-            <a:endParaRPr lang="en-US" sz="1200" dirty="0"/>
-          </a:p>
-        </p:txBody>
-      </p:sp>
-      <p:sp>
-        <p:nvSpPr>
-          <p:cNvPr id="8" name="Text 6"/>
-          <p:cNvSpPr/>
-          <p:nvPr/>
-        </p:nvSpPr>
-        <p:spPr>
-          <a:xfrm>
-            <a:off x="7589520" y="2715768"/>
-            <a:ext cx="3776472" cy="640080"/>
-          </a:xfrm>
-          <a:prstGeom prst="rect">
-            <a:avLst/>
-          </a:prstGeom>
-          <a:noFill/>
-          <a:ln/>
-        </p:spPr>
-        <p:txBody>
-          <a:bodyPr wrap="square" rtlCol="0" anchor="t"/>
-          <a:lstStyle/>
-          <a:p>
-            <a:pPr indent="0" marL="0">
-              <a:lnSpc>
-                <a:spcPct val="95000"/>
-              </a:lnSpc>
-              <a:buNone/>
-            </a:pPr>
-            <a:r>
-              <a:rPr lang="en-US" sz="1700" b="1" dirty="0">
-                <a:solidFill>
-                  <a:srgbClr val="173A68"/>
-                </a:solidFill>
-                <a:latin typeface="Cambria" pitchFamily="34" charset="0"/>
-                <a:ea typeface="Cambria" pitchFamily="34" charset="-122"/>
-                <a:cs typeface="Cambria" pitchFamily="34" charset="-120"/>
-              </a:rPr>
-              <a:t>FiO₂ alone won't fix shunt</a:t>
-            </a:r>
-            <a:endParaRPr lang="en-US" sz="1700" dirty="0"/>
-          </a:p>
-        </p:txBody>
-      </p:sp>
-      <p:sp>
-        <p:nvSpPr>
-          <p:cNvPr id="9" name="Text 7"/>
-          <p:cNvSpPr/>
-          <p:nvPr/>
-        </p:nvSpPr>
-        <p:spPr>
-          <a:xfrm>
-            <a:off x="7589520" y="3474720"/>
-            <a:ext cx="3776472" cy="2286000"/>
-          </a:xfrm>
-          <a:prstGeom prst="rect">
-            <a:avLst/>
-          </a:prstGeom>
-          <a:noFill/>
-          <a:ln/>
-        </p:spPr>
-        <p:txBody>
-          <a:bodyPr wrap="square" rtlCol="0" anchor="t"/>
-          <a:lstStyle/>
-          <a:p>
-            <a:pPr indent="0" marL="0">
-              <a:lnSpc>
-                <a:spcPct val="103000"/>
-              </a:lnSpc>
-              <a:buNone/>
-            </a:pPr>
-            <a:r>
-              <a:rPr lang="en-US" sz="1350" dirty="0">
-                <a:solidFill>
-                  <a:srgbClr val="1B2433"/>
-                </a:solidFill>
-                <a:latin typeface="Calibri" pitchFamily="34" charset="0"/>
-                <a:ea typeface="Calibri" pitchFamily="34" charset="-122"/>
-                <a:cs typeface="Calibri" pitchFamily="34" charset="-120"/>
-              </a:rPr>
-              <a:t>If a patient on a non-rebreather at flush rate is still hypoxic, suspect shunt. The bedside fix is PEEP, often via CPAP.</a:t>
-            </a:r>
-            <a:endParaRPr lang="en-US" sz="1350" dirty="0"/>
-          </a:p>
-        </p:txBody>
-      </p:sp>
+        </p:spPr>
+      </p:pic>
     </p:spTree>
   </p:cSld>
   <p:clrMapOvr>
@@ -6660,151 +6418,30 @@
           </a:p>
         </p:txBody>
       </p:sp>
-      <p:sp>
-        <p:nvSpPr>
-          <p:cNvPr id="6" name="Shape 4"/>
-          <p:cNvSpPr/>
-          <p:nvPr/>
-        </p:nvSpPr>
-        <p:spPr>
-          <a:xfrm>
-            <a:off x="7315200" y="2148840"/>
-            <a:ext cx="4325112" cy="3840480"/>
-          </a:xfrm>
-          <a:prstGeom prst="roundRect">
-            <a:avLst>
-              <a:gd name="adj" fmla="val 2381"/>
-            </a:avLst>
-          </a:prstGeom>
-          <a:solidFill>
-            <a:srgbClr val="FBEFDD"/>
-          </a:solidFill>
-          <a:ln/>
-        </p:spPr>
-      </p:sp>
-      <p:sp>
-        <p:nvSpPr>
-          <p:cNvPr id="7" name="Text 5"/>
-          <p:cNvSpPr/>
-          <p:nvPr/>
-        </p:nvSpPr>
-        <p:spPr>
-          <a:xfrm>
-            <a:off x="7589520" y="2377440"/>
-            <a:ext cx="3776472" cy="320040"/>
+      <p:pic>
+        <p:nvPicPr>
+          <p:cNvPr id="6" name="Image 0" descr="/tmp/claude-0/-home-user-amr-kc-protocols/883711fe-5eaa-500f-ae13-4d63d2ddcc7e/scratchpad/pngs/pip_pplat.png">    </p:cNvPr>
+          <p:cNvPicPr>
+            <a:picLocks noChangeAspect="1"/>
+          </p:cNvPicPr>
+          <p:nvPr/>
+        </p:nvPicPr>
+        <p:blipFill>
+          <a:blip r:embed="rId1"/>
+          <a:stretch>
+            <a:fillRect/>
+          </a:stretch>
+        </p:blipFill>
+        <p:spPr>
+          <a:xfrm>
+            <a:off x="7040880" y="2634454"/>
+            <a:ext cx="4709160" cy="2320612"/>
           </a:xfrm>
           <a:prstGeom prst="rect">
             <a:avLst/>
           </a:prstGeom>
-          <a:noFill/>
-          <a:ln/>
-        </p:spPr>
-        <p:txBody>
-          <a:bodyPr wrap="square" rtlCol="0" anchor="ctr"/>
-          <a:lstStyle/>
-          <a:p>
-            <a:pPr indent="0" marL="0">
-              <a:buNone/>
-            </a:pPr>
-            <a:r>
-              <a:rPr lang="en-US" sz="1200" b="1" spc="200" kern="0" dirty="0">
-                <a:solidFill>
-                  <a:srgbClr val="9C540B"/>
-                </a:solidFill>
-                <a:latin typeface="Calibri" pitchFamily="34" charset="0"/>
-                <a:ea typeface="Calibri" pitchFamily="34" charset="-122"/>
-                <a:cs typeface="Calibri" pitchFamily="34" charset="-120"/>
-              </a:rPr>
-              <a:t>CLINICAL PEARL</a:t>
-            </a:r>
-            <a:endParaRPr lang="en-US" sz="1200" dirty="0"/>
-          </a:p>
-        </p:txBody>
-      </p:sp>
-      <p:sp>
-        <p:nvSpPr>
-          <p:cNvPr id="8" name="Text 6"/>
-          <p:cNvSpPr/>
-          <p:nvPr/>
-        </p:nvSpPr>
-        <p:spPr>
-          <a:xfrm>
-            <a:off x="7589520" y="2715768"/>
-            <a:ext cx="3776472" cy="640080"/>
-          </a:xfrm>
-          <a:prstGeom prst="rect">
-            <a:avLst/>
-          </a:prstGeom>
-          <a:noFill/>
-          <a:ln/>
-        </p:spPr>
-        <p:txBody>
-          <a:bodyPr wrap="square" rtlCol="0" anchor="t"/>
-          <a:lstStyle/>
-          <a:p>
-            <a:pPr indent="0" marL="0">
-              <a:lnSpc>
-                <a:spcPct val="95000"/>
-              </a:lnSpc>
-              <a:buNone/>
-            </a:pPr>
-            <a:r>
-              <a:rPr lang="en-US" sz="1700" b="1" dirty="0">
-                <a:solidFill>
-                  <a:srgbClr val="173A68"/>
-                </a:solidFill>
-                <a:latin typeface="Cambria" pitchFamily="34" charset="0"/>
-                <a:ea typeface="Cambria" pitchFamily="34" charset="-122"/>
-                <a:cs typeface="Cambria" pitchFamily="34" charset="-120"/>
-              </a:rPr>
-              <a:t>PIP up, Pplat up?</a:t>
-            </a:r>
-            <a:endParaRPr lang="en-US" sz="1700" dirty="0"/>
-          </a:p>
-        </p:txBody>
-      </p:sp>
-      <p:sp>
-        <p:nvSpPr>
-          <p:cNvPr id="9" name="Text 7"/>
-          <p:cNvSpPr/>
-          <p:nvPr/>
-        </p:nvSpPr>
-        <p:spPr>
-          <a:xfrm>
-            <a:off x="7589520" y="3474720"/>
-            <a:ext cx="3776472" cy="2286000"/>
-          </a:xfrm>
-          <a:prstGeom prst="rect">
-            <a:avLst/>
-          </a:prstGeom>
-          <a:noFill/>
-          <a:ln/>
-        </p:spPr>
-        <p:txBody>
-          <a:bodyPr wrap="square" rtlCol="0" anchor="t"/>
-          <a:lstStyle/>
-          <a:p>
-            <a:pPr indent="0" marL="0">
-              <a:lnSpc>
-                <a:spcPct val="103000"/>
-              </a:lnSpc>
-              <a:buNone/>
-            </a:pPr>
-            <a:r>
-              <a:rPr lang="en-US" sz="1350" dirty="0">
-                <a:solidFill>
-                  <a:srgbClr val="1B2433"/>
-                </a:solidFill>
-                <a:latin typeface="Calibri" pitchFamily="34" charset="0"/>
-                <a:ea typeface="Calibri" pitchFamily="34" charset="-122"/>
-                <a:cs typeface="Calibri" pitchFamily="34" charset="-120"/>
-              </a:rPr>
-              <a:t>Both up = lung problem. PIP up but Pplat normal = airway problem. The bedside test takes 3 seconds — press the inspiratory hold button.</a:t>
-            </a:r>
-            <a:endParaRPr lang="en-US" sz="1350" dirty="0"/>
-          </a:p>
-        </p:txBody>
-      </p:sp>
+        </p:spPr>
+      </p:pic>
     </p:spTree>
   </p:cSld>
   <p:clrMapOvr>
